--- a/Lesson_7/Estabilidad.pptx
+++ b/Lesson_7/Estabilidad.pptx
@@ -191,7 +191,7 @@
 <file path=ppt/revisionInfo.xml><?xml version="1.0" encoding="utf-8"?>
 <p1510:revInfo xmlns:a="http://schemas.openxmlformats.org/drawingml/2006/main" xmlns:r="http://schemas.openxmlformats.org/officeDocument/2006/relationships" xmlns:p1510="http://schemas.microsoft.com/office/powerpoint/2015/10/main">
   <p1510:revLst>
-    <p1510:client id="{AEC54755-DF3E-4DB5-AEB8-E32A294BDE7C}" v="19" dt="2025-10-01T13:08:44.042"/>
+    <p1510:client id="{4987D458-56C7-214D-A630-1AC815B3C3AD}" v="2" dt="2025-10-10T21:52:02.718"/>
   </p1510:revLst>
 </p1510:revInfo>
 </file>
@@ -658,8 +658,8 @@
   </pc:docChgLst>
   <pc:docChgLst>
     <pc:chgData name="JHEYSON FABIAN VILLAVISAN BUITRAGO" userId="e5ced5c2-d787-455d-b115-4f08a699b8c8" providerId="ADAL" clId="{D29F3602-5A42-550B-85C2-F2C884FDDEDE}"/>
-    <pc:docChg chg="delSld modSection">
-      <pc:chgData name="JHEYSON FABIAN VILLAVISAN BUITRAGO" userId="e5ced5c2-d787-455d-b115-4f08a699b8c8" providerId="ADAL" clId="{D29F3602-5A42-550B-85C2-F2C884FDDEDE}" dt="2025-09-30T19:21:58.678" v="0" actId="2696"/>
+    <pc:docChg chg="custSel delSld modSld modSection">
+      <pc:chgData name="JHEYSON FABIAN VILLAVISAN BUITRAGO" userId="e5ced5c2-d787-455d-b115-4f08a699b8c8" providerId="ADAL" clId="{D29F3602-5A42-550B-85C2-F2C884FDDEDE}" dt="2025-10-10T21:52:02.718" v="10" actId="20577"/>
       <pc:docMkLst>
         <pc:docMk/>
       </pc:docMkLst>
@@ -669,6 +669,82 @@
           <pc:docMk/>
           <pc:sldMk cId="2505371292" sldId="270"/>
         </pc:sldMkLst>
+      </pc:sldChg>
+      <pc:sldChg chg="modSp mod">
+        <pc:chgData name="JHEYSON FABIAN VILLAVISAN BUITRAGO" userId="e5ced5c2-d787-455d-b115-4f08a699b8c8" providerId="ADAL" clId="{D29F3602-5A42-550B-85C2-F2C884FDDEDE}" dt="2025-10-10T21:43:34.617" v="2" actId="20577"/>
+        <pc:sldMkLst>
+          <pc:docMk/>
+          <pc:sldMk cId="1298072685" sldId="290"/>
+        </pc:sldMkLst>
+        <pc:spChg chg="mod">
+          <ac:chgData name="JHEYSON FABIAN VILLAVISAN BUITRAGO" userId="e5ced5c2-d787-455d-b115-4f08a699b8c8" providerId="ADAL" clId="{D29F3602-5A42-550B-85C2-F2C884FDDEDE}" dt="2025-10-10T21:43:34.617" v="2" actId="20577"/>
+          <ac:spMkLst>
+            <pc:docMk/>
+            <pc:sldMk cId="1298072685" sldId="290"/>
+            <ac:spMk id="10" creationId="{AF4E183E-A171-4923-A99E-D149888CEC37}"/>
+          </ac:spMkLst>
+        </pc:spChg>
+      </pc:sldChg>
+      <pc:sldChg chg="modSp mod">
+        <pc:chgData name="JHEYSON FABIAN VILLAVISAN BUITRAGO" userId="e5ced5c2-d787-455d-b115-4f08a699b8c8" providerId="ADAL" clId="{D29F3602-5A42-550B-85C2-F2C884FDDEDE}" dt="2025-10-10T21:52:02.464" v="9" actId="27636"/>
+        <pc:sldMkLst>
+          <pc:docMk/>
+          <pc:sldMk cId="1914623419" sldId="291"/>
+        </pc:sldMkLst>
+        <pc:spChg chg="mod">
+          <ac:chgData name="JHEYSON FABIAN VILLAVISAN BUITRAGO" userId="e5ced5c2-d787-455d-b115-4f08a699b8c8" providerId="ADAL" clId="{D29F3602-5A42-550B-85C2-F2C884FDDEDE}" dt="2025-10-10T21:52:02.464" v="9" actId="27636"/>
+          <ac:spMkLst>
+            <pc:docMk/>
+            <pc:sldMk cId="1914623419" sldId="291"/>
+            <ac:spMk id="3" creationId="{0E5567B7-3B3B-B7EC-6509-0A90554677DC}"/>
+          </ac:spMkLst>
+        </pc:spChg>
+        <pc:spChg chg="mod">
+          <ac:chgData name="JHEYSON FABIAN VILLAVISAN BUITRAGO" userId="e5ced5c2-d787-455d-b115-4f08a699b8c8" providerId="ADAL" clId="{D29F3602-5A42-550B-85C2-F2C884FDDEDE}" dt="2025-10-10T21:43:38.931" v="4" actId="20577"/>
+          <ac:spMkLst>
+            <pc:docMk/>
+            <pc:sldMk cId="1914623419" sldId="291"/>
+            <ac:spMk id="10" creationId="{AF4E183E-A171-4923-A99E-D149888CEC37}"/>
+          </ac:spMkLst>
+        </pc:spChg>
+      </pc:sldChg>
+      <pc:sldChg chg="modSp">
+        <pc:chgData name="JHEYSON FABIAN VILLAVISAN BUITRAGO" userId="e5ced5c2-d787-455d-b115-4f08a699b8c8" providerId="ADAL" clId="{D29F3602-5A42-550B-85C2-F2C884FDDEDE}" dt="2025-10-10T21:52:02.718" v="10" actId="20577"/>
+        <pc:sldMkLst>
+          <pc:docMk/>
+          <pc:sldMk cId="2395213358" sldId="292"/>
+        </pc:sldMkLst>
+        <pc:spChg chg="mod">
+          <ac:chgData name="JHEYSON FABIAN VILLAVISAN BUITRAGO" userId="e5ced5c2-d787-455d-b115-4f08a699b8c8" providerId="ADAL" clId="{D29F3602-5A42-550B-85C2-F2C884FDDEDE}" dt="2025-10-10T21:52:02.718" v="10" actId="20577"/>
+          <ac:spMkLst>
+            <pc:docMk/>
+            <pc:sldMk cId="2395213358" sldId="292"/>
+            <ac:spMk id="12" creationId="{774462CC-BC0C-5617-2AEA-EC351D3F9F5E}"/>
+          </ac:spMkLst>
+        </pc:spChg>
+      </pc:sldChg>
+      <pc:sldChg chg="modSp mod">
+        <pc:chgData name="JHEYSON FABIAN VILLAVISAN BUITRAGO" userId="e5ced5c2-d787-455d-b115-4f08a699b8c8" providerId="ADAL" clId="{D29F3602-5A42-550B-85C2-F2C884FDDEDE}" dt="2025-10-10T21:43:43.837" v="7" actId="1076"/>
+        <pc:sldMkLst>
+          <pc:docMk/>
+          <pc:sldMk cId="1665813746" sldId="294"/>
+        </pc:sldMkLst>
+        <pc:spChg chg="mod">
+          <ac:chgData name="JHEYSON FABIAN VILLAVISAN BUITRAGO" userId="e5ced5c2-d787-455d-b115-4f08a699b8c8" providerId="ADAL" clId="{D29F3602-5A42-550B-85C2-F2C884FDDEDE}" dt="2025-10-10T21:43:43.837" v="7" actId="1076"/>
+          <ac:spMkLst>
+            <pc:docMk/>
+            <pc:sldMk cId="1665813746" sldId="294"/>
+            <ac:spMk id="8" creationId="{91D0B2CE-EAD9-1D3D-073A-F39DBDBBD2E6}"/>
+          </ac:spMkLst>
+        </pc:spChg>
+        <pc:spChg chg="mod">
+          <ac:chgData name="JHEYSON FABIAN VILLAVISAN BUITRAGO" userId="e5ced5c2-d787-455d-b115-4f08a699b8c8" providerId="ADAL" clId="{D29F3602-5A42-550B-85C2-F2C884FDDEDE}" dt="2025-10-10T21:43:42.806" v="6" actId="20577"/>
+          <ac:spMkLst>
+            <pc:docMk/>
+            <pc:sldMk cId="1665813746" sldId="294"/>
+            <ac:spMk id="10" creationId="{89CDACC2-AD99-AF1F-9E1C-FDE99196F443}"/>
+          </ac:spMkLst>
+        </pc:spChg>
       </pc:sldChg>
     </pc:docChg>
   </pc:docChgLst>
@@ -2013,7 +2089,7 @@
               <a:pPr>
                 <a:defRPr/>
               </a:pPr>
-              <a:t>1/10/2025</a:t>
+              <a:t>10/10/25</a:t>
             </a:fld>
             <a:endParaRPr lang="es-CO"/>
           </a:p>
@@ -2256,7 +2332,7 @@
               <a:pPr>
                 <a:defRPr/>
               </a:pPr>
-              <a:t>1/10/2025</a:t>
+              <a:t>10/10/25</a:t>
             </a:fld>
             <a:endParaRPr lang="es-CO"/>
           </a:p>
@@ -2889,6 +2965,96 @@
 </p:notes>
 </file>
 
+<file path=ppt/notesSlides/notesSlide2.xml><?xml version="1.0" encoding="utf-8"?>
+<p:notes xmlns:a="http://schemas.openxmlformats.org/drawingml/2006/main" xmlns:r="http://schemas.openxmlformats.org/officeDocument/2006/relationships" xmlns:p="http://schemas.openxmlformats.org/presentationml/2006/main">
+  <p:cSld>
+    <p:spTree>
+      <p:nvGrpSpPr>
+        <p:cNvPr id="1" name=""/>
+        <p:cNvGrpSpPr/>
+        <p:nvPr/>
+      </p:nvGrpSpPr>
+      <p:grpSpPr>
+        <a:xfrm>
+          <a:off x="0" y="0"/>
+          <a:ext cx="0" cy="0"/>
+          <a:chOff x="0" y="0"/>
+          <a:chExt cx="0" cy="0"/>
+        </a:xfrm>
+      </p:grpSpPr>
+      <p:sp>
+        <p:nvSpPr>
+          <p:cNvPr id="2" name="Marcador de imagen de diapositiva 1"/>
+          <p:cNvSpPr>
+            <a:spLocks noGrp="1" noRot="1" noChangeAspect="1"/>
+          </p:cNvSpPr>
+          <p:nvPr>
+            <p:ph type="sldImg"/>
+          </p:nvPr>
+        </p:nvSpPr>
+        <p:spPr/>
+      </p:sp>
+      <p:sp>
+        <p:nvSpPr>
+          <p:cNvPr id="3" name="Marcador de notas 2"/>
+          <p:cNvSpPr>
+            <a:spLocks noGrp="1"/>
+          </p:cNvSpPr>
+          <p:nvPr>
+            <p:ph type="body" idx="1"/>
+          </p:nvPr>
+        </p:nvSpPr>
+        <p:spPr/>
+        <p:txBody>
+          <a:bodyPr/>
+          <a:lstStyle/>
+          <a:p>
+            <a:endParaRPr lang="es-CO" dirty="0"/>
+          </a:p>
+        </p:txBody>
+      </p:sp>
+      <p:sp>
+        <p:nvSpPr>
+          <p:cNvPr id="4" name="Marcador de número de diapositiva 3"/>
+          <p:cNvSpPr>
+            <a:spLocks noGrp="1"/>
+          </p:cNvSpPr>
+          <p:nvPr>
+            <p:ph type="sldNum" sz="quarter" idx="5"/>
+          </p:nvPr>
+        </p:nvSpPr>
+        <p:spPr/>
+        <p:txBody>
+          <a:bodyPr/>
+          <a:lstStyle/>
+          <a:p>
+            <a:pPr>
+              <a:defRPr/>
+            </a:pPr>
+            <a:fld id="{2D1E0FDF-8C6F-43B4-8722-700C06D0C414}" type="slidenum">
+              <a:rPr lang="es-CO" altLang="es-CO" smtClean="0"/>
+              <a:pPr>
+                <a:defRPr/>
+              </a:pPr>
+              <a:t>19</a:t>
+            </a:fld>
+            <a:endParaRPr lang="es-CO" altLang="es-CO"/>
+          </a:p>
+        </p:txBody>
+      </p:sp>
+    </p:spTree>
+    <p:extLst>
+      <p:ext uri="{BB962C8B-B14F-4D97-AF65-F5344CB8AC3E}">
+        <p14:creationId xmlns:p14="http://schemas.microsoft.com/office/powerpoint/2010/main" val="3508723533"/>
+      </p:ext>
+    </p:extLst>
+  </p:cSld>
+  <p:clrMapOvr>
+    <a:masterClrMapping/>
+  </p:clrMapOvr>
+</p:notes>
+</file>
+
 <file path=ppt/slideLayouts/slideLayout1.xml><?xml version="1.0" encoding="utf-8"?>
 <p:sldLayout xmlns:a="http://schemas.openxmlformats.org/drawingml/2006/main" xmlns:r="http://schemas.openxmlformats.org/officeDocument/2006/relationships" xmlns:p="http://schemas.openxmlformats.org/presentationml/2006/main" type="title" preserve="1">
   <p:cSld name="Diapositiva de título">
@@ -3038,7 +3204,7 @@
           <a:p>
             <a:fld id="{9CF7635E-2D71-42E7-9E6C-FBB85A15A85F}" type="datetimeFigureOut">
               <a:rPr lang="es-CO" smtClean="0"/>
-              <a:t>1/10/2025</a:t>
+              <a:t>10/10/25</a:t>
             </a:fld>
             <a:endParaRPr lang="es-CO"/>
           </a:p>
@@ -3304,7 +3470,7 @@
           <a:p>
             <a:fld id="{9CF7635E-2D71-42E7-9E6C-FBB85A15A85F}" type="datetimeFigureOut">
               <a:rPr lang="es-CO" smtClean="0"/>
-              <a:t>1/10/2025</a:t>
+              <a:t>10/10/25</a:t>
             </a:fld>
             <a:endParaRPr lang="es-CO"/>
           </a:p>
@@ -3520,7 +3686,7 @@
           <a:p>
             <a:fld id="{9CF7635E-2D71-42E7-9E6C-FBB85A15A85F}" type="datetimeFigureOut">
               <a:rPr lang="es-CO" smtClean="0"/>
-              <a:t>1/10/2025</a:t>
+              <a:t>10/10/25</a:t>
             </a:fld>
             <a:endParaRPr lang="es-CO"/>
           </a:p>
@@ -5149,7 +5315,7 @@
           <a:p>
             <a:fld id="{9CF7635E-2D71-42E7-9E6C-FBB85A15A85F}" type="datetimeFigureOut">
               <a:rPr lang="es-CO" smtClean="0"/>
-              <a:t>1/10/2025</a:t>
+              <a:t>10/10/25</a:t>
             </a:fld>
             <a:endParaRPr lang="es-CO"/>
           </a:p>
@@ -5596,7 +5762,7 @@
           <a:p>
             <a:fld id="{9CF7635E-2D71-42E7-9E6C-FBB85A15A85F}" type="datetimeFigureOut">
               <a:rPr lang="es-CO" smtClean="0"/>
-              <a:t>1/10/2025</a:t>
+              <a:t>10/10/25</a:t>
             </a:fld>
             <a:endParaRPr lang="es-CO"/>
           </a:p>
@@ -5870,7 +6036,7 @@
           <a:p>
             <a:fld id="{9CF7635E-2D71-42E7-9E6C-FBB85A15A85F}" type="datetimeFigureOut">
               <a:rPr lang="es-CO" smtClean="0"/>
-              <a:t>1/10/2025</a:t>
+              <a:t>10/10/25</a:t>
             </a:fld>
             <a:endParaRPr lang="es-CO"/>
           </a:p>
@@ -6291,7 +6457,7 @@
           <a:p>
             <a:fld id="{9CF7635E-2D71-42E7-9E6C-FBB85A15A85F}" type="datetimeFigureOut">
               <a:rPr lang="es-CO" smtClean="0"/>
-              <a:t>1/10/2025</a:t>
+              <a:t>10/10/25</a:t>
             </a:fld>
             <a:endParaRPr lang="es-CO"/>
           </a:p>
@@ -6439,7 +6605,7 @@
           <a:p>
             <a:fld id="{9CF7635E-2D71-42E7-9E6C-FBB85A15A85F}" type="datetimeFigureOut">
               <a:rPr lang="es-CO" smtClean="0"/>
-              <a:t>1/10/2025</a:t>
+              <a:t>10/10/25</a:t>
             </a:fld>
             <a:endParaRPr lang="es-CO"/>
           </a:p>
@@ -6558,7 +6724,7 @@
           <a:p>
             <a:fld id="{9CF7635E-2D71-42E7-9E6C-FBB85A15A85F}" type="datetimeFigureOut">
               <a:rPr lang="es-CO" smtClean="0"/>
-              <a:t>1/10/2025</a:t>
+              <a:t>10/10/25</a:t>
             </a:fld>
             <a:endParaRPr lang="es-CO"/>
           </a:p>
@@ -6877,7 +7043,7 @@
           <a:p>
             <a:fld id="{9CF7635E-2D71-42E7-9E6C-FBB85A15A85F}" type="datetimeFigureOut">
               <a:rPr lang="es-CO" smtClean="0"/>
-              <a:t>1/10/2025</a:t>
+              <a:t>10/10/25</a:t>
             </a:fld>
             <a:endParaRPr lang="es-CO"/>
           </a:p>
@@ -7172,7 +7338,7 @@
           <a:p>
             <a:fld id="{9CF7635E-2D71-42E7-9E6C-FBB85A15A85F}" type="datetimeFigureOut">
               <a:rPr lang="es-CO" smtClean="0"/>
-              <a:t>1/10/2025</a:t>
+              <a:t>10/10/25</a:t>
             </a:fld>
             <a:endParaRPr lang="es-CO"/>
           </a:p>
@@ -7421,7 +7587,7 @@
           <a:p>
             <a:fld id="{9CF7635E-2D71-42E7-9E6C-FBB85A15A85F}" type="datetimeFigureOut">
               <a:rPr lang="es-CO" smtClean="0"/>
-              <a:t>1/10/2025</a:t>
+              <a:t>10/10/25</a:t>
             </a:fld>
             <a:endParaRPr lang="es-CO"/>
           </a:p>
@@ -15677,8 +15843,8 @@
           </a:prstGeom>
         </p:spPr>
       </p:pic>
-      <mc:AlternateContent xmlns:mc="http://schemas.openxmlformats.org/markup-compatibility/2006" xmlns:a14="http://schemas.microsoft.com/office/drawing/2010/main">
-        <mc:Choice Requires="a14">
+      <mc:AlternateContent xmlns:mc="http://schemas.openxmlformats.org/markup-compatibility/2006">
+        <mc:Choice xmlns:a14="http://schemas.microsoft.com/office/drawing/2010/main" Requires="a14">
           <p:sp>
             <p:nvSpPr>
               <p:cNvPr id="12" name="CuadroTexto 11">
@@ -15795,14 +15961,14 @@
                         </m:e>
                         <m:sub>
                           <m:r>
-                            <a:rPr lang="es-CO" b="1" i="1" smtClean="0">
+                            <a:rPr lang="es-419" b="1" i="1" smtClean="0">
                               <a:solidFill>
                                 <a:schemeClr val="tx1"/>
                               </a:solidFill>
                               <a:effectLst/>
                               <a:latin typeface="Cambria Math" panose="02040503050406030204" pitchFamily="18" charset="0"/>
                             </a:rPr>
-                            <m:t>𝒏</m:t>
+                            <m:t>𝟎</m:t>
                           </m:r>
                         </m:sub>
                       </m:sSub>
@@ -16010,7 +16176,7 @@
             </p:txBody>
           </p:sp>
         </mc:Choice>
-        <mc:Fallback xmlns="">
+        <mc:Fallback>
           <p:sp>
             <p:nvSpPr>
               <p:cNvPr id="12" name="CuadroTexto 11">
@@ -18562,8 +18728,8 @@
           <a:p>
             <a:pPr algn="ctr" eaLnBrk="1" hangingPunct="1"/>
             <a:r>
-              <a:rPr lang="es-CO" altLang="es-CO" sz="3600" b="0"/>
-              <a:t>15</a:t>
+              <a:rPr lang="es-CO" altLang="es-CO" sz="3600" b="0" dirty="0"/>
+              <a:t>17</a:t>
             </a:r>
           </a:p>
         </p:txBody>
@@ -19536,7 +19702,7 @@
             <a:pPr algn="ctr" eaLnBrk="1" hangingPunct="1"/>
             <a:r>
               <a:rPr lang="es-CO" altLang="es-CO" sz="3600" b="0" dirty="0"/>
-              <a:t>16</a:t>
+              <a:t>18</a:t>
             </a:r>
           </a:p>
         </p:txBody>
@@ -19840,7 +20006,7 @@
         </p:spPr>
         <p:txBody>
           <a:bodyPr vert="horz" lIns="91440" tIns="45720" rIns="91440" bIns="45720" rtlCol="0" anchor="b">
-            <a:normAutofit/>
+            <a:normAutofit fontScale="92500"/>
           </a:bodyPr>
           <a:lstStyle>
             <a:lvl1pPr algn="l" defTabSz="685800" rtl="0" eaLnBrk="1" latinLnBrk="0" hangingPunct="1">
@@ -20452,7 +20618,7 @@
             <a:pPr algn="ctr" eaLnBrk="1" hangingPunct="1"/>
             <a:r>
               <a:rPr lang="es-CO" altLang="es-CO" sz="3600" b="0" dirty="0"/>
-              <a:t>16</a:t>
+              <a:t>19</a:t>
             </a:r>
           </a:p>
         </p:txBody>
@@ -20472,7 +20638,7 @@
           <p:nvPr/>
         </p:nvPicPr>
         <p:blipFill>
-          <a:blip r:embed="rId2">
+          <a:blip r:embed="rId3">
             <a:extLst>
               <a:ext uri="{28A0092B-C50C-407E-A947-70E740481C1C}">
                 <a14:useLocalDpi xmlns:a14="http://schemas.microsoft.com/office/drawing/2010/main" val="0"/>
@@ -21013,7 +21179,7 @@
                 <a:avLst/>
               </a:prstGeom>
               <a:blipFill>
-                <a:blip r:embed="rId3"/>
+                <a:blip r:embed="rId4"/>
                 <a:stretch>
                   <a:fillRect/>
                 </a:stretch>
@@ -21050,7 +21216,7 @@
         </p:nvSpPr>
         <p:spPr>
           <a:xfrm>
-            <a:off x="651902" y="4945571"/>
+            <a:off x="651902" y="4958097"/>
             <a:ext cx="6334081" cy="1162050"/>
           </a:xfrm>
           <a:prstGeom prst="rect">
@@ -21109,7 +21275,7 @@
           <p:nvPr/>
         </p:nvPicPr>
         <p:blipFill>
-          <a:blip r:embed="rId4"/>
+          <a:blip r:embed="rId5"/>
           <a:stretch>
             <a:fillRect/>
           </a:stretch>
@@ -29502,20 +29668,20 @@
 </file>
 
 <file path=customXml/item1.xml><?xml version="1.0" encoding="utf-8"?>
-<p:properties xmlns:p="http://schemas.microsoft.com/office/2006/metadata/properties" xmlns:xsi="http://www.w3.org/2001/XMLSchema-instance" xmlns:pc="http://schemas.microsoft.com/office/infopath/2007/PartnerControls">
-  <documentManagement>
-    <_activity xmlns="bdc56f61-abc0-4f7e-bfec-a93ccd1ae886" xsi:nil="true"/>
-  </documentManagement>
-</p:properties>
-</file>
-
-<file path=customXml/item2.xml><?xml version="1.0" encoding="utf-8"?>
 <?mso-contentType ?>
 <FormTemplates xmlns="http://schemas.microsoft.com/sharepoint/v3/contenttype/forms">
   <Display>DocumentLibraryForm</Display>
   <Edit>DocumentLibraryForm</Edit>
   <New>DocumentLibraryForm</New>
 </FormTemplates>
+</file>
+
+<file path=customXml/item2.xml><?xml version="1.0" encoding="utf-8"?>
+<p:properties xmlns:p="http://schemas.microsoft.com/office/2006/metadata/properties" xmlns:xsi="http://www.w3.org/2001/XMLSchema-instance" xmlns:pc="http://schemas.microsoft.com/office/infopath/2007/PartnerControls">
+  <documentManagement>
+    <_activity xmlns="bdc56f61-abc0-4f7e-bfec-a93ccd1ae886" xsi:nil="true"/>
+  </documentManagement>
+</p:properties>
 </file>
 
 <file path=customXml/item3.xml><?xml version="1.0" encoding="utf-8"?>
@@ -29754,26 +29920,26 @@
 </file>
 
 <file path=customXml/itemProps1.xml><?xml version="1.0" encoding="utf-8"?>
-<ds:datastoreItem xmlns:ds="http://schemas.openxmlformats.org/officeDocument/2006/customXml" ds:itemID="{0825853C-1B27-4995-A583-4D39F900BB7F}">
+<ds:datastoreItem xmlns:ds="http://schemas.openxmlformats.org/officeDocument/2006/customXml" ds:itemID="{4E8623C8-32E1-48B0-9F0A-13F2E9582B7E}">
   <ds:schemaRefs>
-    <ds:schemaRef ds:uri="http://purl.org/dc/elements/1.1/"/>
-    <ds:schemaRef ds:uri="http://purl.org/dc/terms/"/>
-    <ds:schemaRef ds:uri="http://schemas.microsoft.com/office/2006/documentManagement/types"/>
-    <ds:schemaRef ds:uri="http://www.w3.org/XML/1998/namespace"/>
-    <ds:schemaRef ds:uri="http://schemas.openxmlformats.org/package/2006/metadata/core-properties"/>
-    <ds:schemaRef ds:uri="http://schemas.microsoft.com/office/infopath/2007/PartnerControls"/>
-    <ds:schemaRef ds:uri="http://schemas.microsoft.com/office/2006/metadata/properties"/>
-    <ds:schemaRef ds:uri="bdc56f61-abc0-4f7e-bfec-a93ccd1ae886"/>
-    <ds:schemaRef ds:uri="669280c1-d17e-4d1d-bd7f-b4f14cc6bf1d"/>
-    <ds:schemaRef ds:uri="http://purl.org/dc/dcmitype/"/>
+    <ds:schemaRef ds:uri="http://schemas.microsoft.com/sharepoint/v3/contenttype/forms"/>
   </ds:schemaRefs>
 </ds:datastoreItem>
 </file>
 
 <file path=customXml/itemProps2.xml><?xml version="1.0" encoding="utf-8"?>
-<ds:datastoreItem xmlns:ds="http://schemas.openxmlformats.org/officeDocument/2006/customXml" ds:itemID="{4E8623C8-32E1-48B0-9F0A-13F2E9582B7E}">
+<ds:datastoreItem xmlns:ds="http://schemas.openxmlformats.org/officeDocument/2006/customXml" ds:itemID="{0825853C-1B27-4995-A583-4D39F900BB7F}">
   <ds:schemaRefs>
-    <ds:schemaRef ds:uri="http://schemas.microsoft.com/sharepoint/v3/contenttype/forms"/>
+    <ds:schemaRef ds:uri="669280c1-d17e-4d1d-bd7f-b4f14cc6bf1d"/>
+    <ds:schemaRef ds:uri="http://www.w3.org/XML/1998/namespace"/>
+    <ds:schemaRef ds:uri="bdc56f61-abc0-4f7e-bfec-a93ccd1ae886"/>
+    <ds:schemaRef ds:uri="http://schemas.microsoft.com/office/infopath/2007/PartnerControls"/>
+    <ds:schemaRef ds:uri="http://schemas.openxmlformats.org/package/2006/metadata/core-properties"/>
+    <ds:schemaRef ds:uri="http://purl.org/dc/dcmitype/"/>
+    <ds:schemaRef ds:uri="http://schemas.microsoft.com/office/2006/documentManagement/types"/>
+    <ds:schemaRef ds:uri="http://schemas.microsoft.com/office/2006/metadata/properties"/>
+    <ds:schemaRef ds:uri="http://purl.org/dc/terms/"/>
+    <ds:schemaRef ds:uri="http://purl.org/dc/elements/1.1/"/>
   </ds:schemaRefs>
 </ds:datastoreItem>
 </file>
